--- a/outputs/homework6/202331060205_丁致宇_作业6.pptx
+++ b/outputs/homework6/202331060205_丁致宇_作业6.pptx
@@ -3322,7 +3322,7 @@
                 </a:solidFill>
                 <a:latin typeface="Microsoft YaHei"/>
               </a:rPr>
-              <a:t>9.54%</a:t>
+              <a:t>9.82%</a:t>
             </a:r>
           </a:p>
         </p:txBody>
@@ -3392,7 +3392,7 @@
                 </a:solidFill>
                 <a:latin typeface="Microsoft YaHei"/>
               </a:rPr>
-              <a:t>73</a:t>
+              <a:t>66</a:t>
             </a:r>
           </a:p>
         </p:txBody>
@@ -5387,8 +5387,8 @@
         </p:nvSpPr>
         <p:spPr>
           <a:xfrm>
-            <a:off x="731520" y="1280160"/>
-            <a:ext cx="3657600" cy="475488"/>
+            <a:off x="594360" y="1280160"/>
+            <a:ext cx="4069080" cy="475488"/>
           </a:xfrm>
           <a:prstGeom prst="rect">
             <a:avLst/>
@@ -5403,13 +5403,13 @@
           <a:p>
             <a:pPr algn="ctr"/>
             <a:r>
-              <a:rPr sz="2700" b="1">
+              <a:rPr sz="2200" b="1">
                 <a:solidFill>
                   <a:srgbClr val="1B7F5A"/>
                 </a:solidFill>
                 <a:latin typeface="Microsoft YaHei"/>
               </a:rPr>
-              <a:t>2014-03-31 ~ 2024-12-31</a:t>
+              <a:t>2014.03.31-2024.12.31</a:t>
             </a:r>
           </a:p>
         </p:txBody>
@@ -5422,8 +5422,8 @@
         </p:nvSpPr>
         <p:spPr>
           <a:xfrm>
-            <a:off x="731520" y="1792224"/>
-            <a:ext cx="3657600" cy="292608"/>
+            <a:off x="594360" y="1792224"/>
+            <a:ext cx="4069080" cy="292608"/>
           </a:xfrm>
           <a:prstGeom prst="rect">
             <a:avLst/>
@@ -5457,8 +5457,8 @@
         </p:nvSpPr>
         <p:spPr>
           <a:xfrm>
-            <a:off x="4617720" y="1280160"/>
-            <a:ext cx="2194560" cy="475488"/>
+            <a:off x="4800600" y="1280160"/>
+            <a:ext cx="1965960" cy="475488"/>
           </a:xfrm>
           <a:prstGeom prst="rect">
             <a:avLst/>
@@ -5492,8 +5492,8 @@
         </p:nvSpPr>
         <p:spPr>
           <a:xfrm>
-            <a:off x="4617720" y="1792224"/>
-            <a:ext cx="2194560" cy="292608"/>
+            <a:off x="4800600" y="1792224"/>
+            <a:ext cx="1965960" cy="292608"/>
           </a:xfrm>
           <a:prstGeom prst="rect">
             <a:avLst/>
@@ -5549,7 +5549,7 @@
                 </a:solidFill>
                 <a:latin typeface="Microsoft YaHei"/>
               </a:rPr>
-              <a:t>803</a:t>
+              <a:t>446</a:t>
             </a:r>
           </a:p>
         </p:txBody>
@@ -5619,7 +5619,7 @@
                 </a:solidFill>
                 <a:latin typeface="Microsoft YaHei"/>
               </a:rPr>
-              <a:t>73</a:t>
+              <a:t>66</a:t>
             </a:r>
           </a:p>
         </p:txBody>
@@ -5667,8 +5667,8 @@
         </p:nvSpPr>
         <p:spPr>
           <a:xfrm>
-            <a:off x="868680" y="3520440"/>
-            <a:ext cx="4937760" cy="1417320"/>
+            <a:off x="868680" y="3383280"/>
+            <a:ext cx="4937760" cy="1600200"/>
           </a:xfrm>
           <a:prstGeom prst="roundRect">
             <a:avLst/>
@@ -5712,7 +5712,7 @@
         </p:nvSpPr>
         <p:spPr>
           <a:xfrm>
-            <a:off x="1033271" y="3657600"/>
+            <a:off x="1033271" y="3520440"/>
             <a:ext cx="4608576" cy="292608"/>
           </a:xfrm>
           <a:prstGeom prst="rect">
@@ -5734,7 +5734,7 @@
                 </a:solidFill>
                 <a:latin typeface="Microsoft YaHei"/>
               </a:rPr>
-              <a:t>防未来泄露</a:t>
+              <a:t>动态成分与防泄露</a:t>
             </a:r>
           </a:p>
         </p:txBody>
@@ -5747,8 +5747,8 @@
         </p:nvSpPr>
         <p:spPr>
           <a:xfrm>
-            <a:off x="1033271" y="4050791"/>
-            <a:ext cx="4608576" cy="758952"/>
+            <a:off x="1033271" y="3913632"/>
+            <a:ext cx="4608576" cy="941832"/>
           </a:xfrm>
           <a:prstGeom prst="rect">
             <a:avLst/>
@@ -5769,7 +5769,7 @@
                 </a:solidFill>
                 <a:latin typeface="Microsoft YaHei"/>
               </a:rPr>
-              <a:t>未来1年FCFF标签用于训练，因此模型训练标签截至2016；2017只作为2018持仓打分起点。</a:t>
+              <a:t>年度面板只保留财年12月31日仍在上证50且有行情快照的股票；LGBM训练标签截至2016。</a:t>
             </a:r>
           </a:p>
         </p:txBody>
@@ -5782,8 +5782,8 @@
         </p:nvSpPr>
         <p:spPr>
           <a:xfrm>
-            <a:off x="6263640" y="3520440"/>
-            <a:ext cx="4846320" cy="1417320"/>
+            <a:off x="6263640" y="3383280"/>
+            <a:ext cx="4846320" cy="1600200"/>
           </a:xfrm>
           <a:prstGeom prst="roundRect">
             <a:avLst/>
@@ -5827,7 +5827,7 @@
         </p:nvSpPr>
         <p:spPr>
           <a:xfrm>
-            <a:off x="6428231" y="3657600"/>
+            <a:off x="6428231" y="3520440"/>
             <a:ext cx="4517136" cy="292608"/>
           </a:xfrm>
           <a:prstGeom prst="rect">
@@ -5862,8 +5862,8 @@
         </p:nvSpPr>
         <p:spPr>
           <a:xfrm>
-            <a:off x="6428231" y="4050791"/>
-            <a:ext cx="4517136" cy="758952"/>
+            <a:off x="6428231" y="3913632"/>
+            <a:ext cx="4517136" cy="941832"/>
           </a:xfrm>
           <a:prstGeom prst="rect">
             <a:avLst/>
@@ -5884,7 +5884,7 @@
                 </a:solidFill>
                 <a:latin typeface="Microsoft YaHei"/>
               </a:rPr>
-              <a:t>价格回测覆盖2018-2024；未来3年FCFF标签因数据截止2024，只能验证到2021年截面。</a:t>
+              <a:t>价格回测覆盖2018-2024，并使用滞后2年的已披露年报得分；3年FCFF标签验证到2021截面。</a:t>
             </a:r>
           </a:p>
         </p:txBody>
@@ -6905,7 +6905,7 @@
                           </a:solidFill>
                           <a:latin typeface="Microsoft YaHei"/>
                         </a:rPr>
-                        <a:t>0.0996</a:t>
+                        <a:t>0.0953</a:t>
                       </a:r>
                     </a:p>
                   </a:txBody>
@@ -6928,7 +6928,7 @@
                           </a:solidFill>
                           <a:latin typeface="Microsoft YaHei"/>
                         </a:rPr>
-                        <a:t>1.175</a:t>
+                        <a:t>0.818</a:t>
                       </a:r>
                     </a:p>
                   </a:txBody>
@@ -6951,7 +6951,7 @@
                           </a:solidFill>
                           <a:latin typeface="Microsoft YaHei"/>
                         </a:rPr>
-                        <a:t>3.53</a:t>
+                        <a:t>3.04</a:t>
                       </a:r>
                     </a:p>
                   </a:txBody>
@@ -6999,7 +6999,7 @@
                           </a:solidFill>
                           <a:latin typeface="Microsoft YaHei"/>
                         </a:rPr>
-                        <a:t>0.0684</a:t>
+                        <a:t>0.0681</a:t>
                       </a:r>
                     </a:p>
                   </a:txBody>
@@ -7022,7 +7022,7 @@
                           </a:solidFill>
                           <a:latin typeface="Microsoft YaHei"/>
                         </a:rPr>
-                        <a:t>0.407</a:t>
+                        <a:t>0.404</a:t>
                       </a:r>
                     </a:p>
                   </a:txBody>
@@ -7045,7 +7045,7 @@
                           </a:solidFill>
                           <a:latin typeface="Microsoft YaHei"/>
                         </a:rPr>
-                        <a:t>1.45</a:t>
+                        <a:t>2.62</a:t>
                       </a:r>
                     </a:p>
                   </a:txBody>
@@ -7093,7 +7093,7 @@
                           </a:solidFill>
                           <a:latin typeface="Microsoft YaHei"/>
                         </a:rPr>
-                        <a:t>0.0540</a:t>
+                        <a:t>0.0538</a:t>
                       </a:r>
                     </a:p>
                   </a:txBody>
@@ -7116,7 +7116,7 @@
                           </a:solidFill>
                           <a:latin typeface="Microsoft YaHei"/>
                         </a:rPr>
-                        <a:t>0.267</a:t>
+                        <a:t>0.266</a:t>
                       </a:r>
                     </a:p>
                   </a:txBody>
@@ -7139,7 +7139,7 @@
                           </a:solidFill>
                           <a:latin typeface="Microsoft YaHei"/>
                         </a:rPr>
-                        <a:t>1.36</a:t>
+                        <a:t>1.82</a:t>
                       </a:r>
                     </a:p>
                   </a:txBody>
@@ -7233,7 +7233,7 @@
                           </a:solidFill>
                           <a:latin typeface="Microsoft YaHei"/>
                         </a:rPr>
-                        <a:t>1.22</a:t>
+                        <a:t>1.75</a:t>
                       </a:r>
                     </a:p>
                   </a:txBody>
@@ -7327,7 +7327,7 @@
                           </a:solidFill>
                           <a:latin typeface="Microsoft YaHei"/>
                         </a:rPr>
-                        <a:t>1.97</a:t>
+                        <a:t>3.46</a:t>
                       </a:r>
                     </a:p>
                   </a:txBody>
@@ -7652,7 +7652,7 @@
                 </a:solidFill>
                 <a:latin typeface="Microsoft YaHei"/>
               </a:rPr>
-              <a:t>平均验证MSE：598.2227</a:t>
+              <a:t>平均验证MSE：595.8789</a:t>
             </a:r>
           </a:p>
         </p:txBody>
@@ -7898,7 +7898,7 @@
                 </a:solidFill>
                 <a:latin typeface="Microsoft YaHei"/>
               </a:rPr>
-              <a:t>同一年度截面，同一A/B/C分组，后续FCFF和股价回测使用完全一致的分组股票。</a:t>
+              <a:t>同一年度截面，同一A/B/C分组；价格回测按年报披露可得性使用滞后2年得分。</a:t>
             </a:r>
           </a:p>
         </p:txBody>
@@ -7978,7 +7978,7 @@
                 </a:solidFill>
                 <a:latin typeface="Microsoft YaHei"/>
               </a:rPr>
-              <a:t>方案A：固定阈值传统规则</a:t>
+              <a:t>方案A：固定阈值硬筛</a:t>
             </a:r>
           </a:p>
         </p:txBody>
@@ -8013,7 +8013,7 @@
                 </a:solidFill>
                 <a:latin typeface="Microsoft YaHei"/>
               </a:rPr>
-              <a:t>净利润正增长、净利率为正、轻资产、低负债、ROE质量、费用控制、现金流质量、分红与FCFF为正。</a:t>
+              <a:t>A组必须全部通过净利润增长、净利率、轻资产、低负债、ROE、费用、现金流、分红、股息率和FCFF阈值；B/C为未通过股票的对照分层。</a:t>
             </a:r>
           </a:p>
         </p:txBody>
@@ -8243,7 +8243,7 @@
                 </a:solidFill>
                 <a:latin typeface="Microsoft YaHei"/>
               </a:rPr>
-              <a:t>年末截面打分，下一年等权持有；初始资金100万，单边手续费0.1%，基准为沪深300。</a:t>
+              <a:t>2018持仓使用2016财年得分，之后逐年滚动；等权持有，初始资金100万，单边手续费0.1%，基准为沪深300。</a:t>
             </a:r>
           </a:p>
         </p:txBody>
